--- a/figures/fig_method_final.pptx
+++ b/figures/fig_method_final.pptx
@@ -11634,13 +11634,13 @@
           </p:spPr>
           <p:txBody>
             <a:bodyPr wrap="none" lIns="0" tIns="0" rIns="0" bIns="0" anchor="ctr">
-              <a:noAutofit/>
+              <a:normAutofit/>
             </a:bodyPr>
             <a:lstStyle/>
             <a:p>
               <a:pPr algn="ctr"/>
               <a:r>
-                <a:rPr sz="1600" b="1" i="0">
+                <a:rPr lang="en-US" sz="1600" b="1" i="0">
                   <a:solidFill>
                     <a:srgbClr val="FFFFFF"/>
                   </a:solidFill>
@@ -11648,9 +11648,9 @@
                   <a:ea typeface="Times New Roman" panose="02020603050405020304"/>
                   <a:cs typeface="Times New Roman" panose="02020603050405020304"/>
                 </a:rPr>
-                <a:t>Process-informed event labels</a:t>
+                <a:t>Process-informed rules</a:t>
               </a:r>
-              <a:endParaRPr sz="1600" b="1" i="0">
+              <a:endParaRPr lang="en-US" sz="1600" b="1" i="0">
                 <a:solidFill>
                   <a:srgbClr val="FFFFFF"/>
                 </a:solidFill>
@@ -12973,13 +12973,13 @@
           </p:spPr>
           <p:txBody>
             <a:bodyPr wrap="none" lIns="0" tIns="0" rIns="0" bIns="0" anchor="t">
-              <a:noAutofit/>
+              <a:normAutofit/>
             </a:bodyPr>
             <a:lstStyle/>
             <a:p>
               <a:pPr algn="ctr"/>
               <a:r>
-                <a:rPr sz="1200" b="1" i="0">
+                <a:rPr lang="en-US" sz="1100" b="1" i="0">
                   <a:solidFill>
                     <a:srgbClr val="262626"/>
                   </a:solidFill>
@@ -12987,9 +12987,9 @@
                   <a:ea typeface="Times New Roman" panose="02020603050405020304"/>
                   <a:cs typeface="Times New Roman" panose="02020603050405020304"/>
                 </a:rPr>
-                <a:t>Short-pattern</a:t>
+                <a:t>Clustered temporal-pattern</a:t>
               </a:r>
-              <a:endParaRPr sz="1200" b="1" i="0">
+              <a:endParaRPr lang="en-US" sz="1100" b="1" i="0">
                 <a:solidFill>
                   <a:srgbClr val="262626"/>
                 </a:solidFill>
@@ -13001,7 +13001,7 @@
             <a:p>
               <a:pPr algn="ctr"/>
               <a:r>
-                <a:rPr sz="1200" b="1" i="0">
+                <a:rPr lang="en-US" sz="1100" b="1" i="0">
                   <a:solidFill>
                     <a:srgbClr val="262626"/>
                   </a:solidFill>
@@ -13009,9 +13009,9 @@
                   <a:ea typeface="Times New Roman" panose="02020603050405020304"/>
                   <a:cs typeface="Times New Roman" panose="02020603050405020304"/>
                 </a:rPr>
-                <a:t>clustering</a:t>
+                <a:t>construction</a:t>
               </a:r>
-              <a:endParaRPr sz="1200" b="1" i="0">
+              <a:endParaRPr lang="en-US" sz="1100" b="1" i="0">
                 <a:solidFill>
                   <a:srgbClr val="262626"/>
                 </a:solidFill>
@@ -19604,22 +19604,11 @@
           </p:spPr>
           <p:txBody>
             <a:bodyPr wrap="none" lIns="0" tIns="0" rIns="0" bIns="0" anchor="ctr">
-              <a:noAutofit/>
+              <a:normAutofit/>
             </a:bodyPr>
             <a:lstStyle/>
             <a:p>
               <a:pPr algn="ctr"/>
-              <a:r>
-                <a:rPr sz="1600" b="1" i="0">
-                  <a:solidFill>
-                    <a:srgbClr val="FFFFFF"/>
-                  </a:solidFill>
-                  <a:latin typeface="Times New Roman" panose="02020603050405020304"/>
-                  <a:ea typeface="Times New Roman" panose="02020603050405020304"/>
-                  <a:cs typeface="Times New Roman" panose="02020603050405020304"/>
-                </a:rPr>
-                <a:t>Delay</a:t>
-              </a:r>
               <a:r>
                 <a:rPr lang="en-US" sz="1600" b="1" i="0">
                   <a:solidFill>
@@ -19629,20 +19618,9 @@
                   <a:ea typeface="Times New Roman" panose="02020603050405020304"/>
                   <a:cs typeface="Times New Roman" panose="02020603050405020304"/>
                 </a:rPr>
-                <a:t>ed</a:t>
+                <a:t>Prototype-conditioned delay-aware propagation module</a:t>
               </a:r>
-              <a:r>
-                <a:rPr sz="1600" b="1" i="0">
-                  <a:solidFill>
-                    <a:srgbClr val="FFFFFF"/>
-                  </a:solidFill>
-                  <a:latin typeface="Times New Roman" panose="02020603050405020304"/>
-                  <a:ea typeface="Times New Roman" panose="02020603050405020304"/>
-                  <a:cs typeface="Times New Roman" panose="02020603050405020304"/>
-                </a:rPr>
-                <a:t>-propagation module</a:t>
-              </a:r>
-              <a:endParaRPr sz="1600" b="1" i="0">
+              <a:endParaRPr lang="en-US" sz="1600" b="1" i="0">
                 <a:solidFill>
                   <a:srgbClr val="FFFFFF"/>
                 </a:solidFill>

--- a/figures/fig_method_final.pptx
+++ b/figures/fig_method_final.pptx
@@ -3486,7 +3486,7 @@
                   </a:solidFill>
                   <a:latin typeface="Times New Roman" panose="02020603050405020304"/>
                 </a:rPr>
-                <a:t>Human</a:t>
+                <a:t>Worker</a:t>
               </a:r>
               <a:endParaRPr sz="1140" b="0">
                 <a:solidFill>
@@ -11082,7 +11082,7 @@
                   <a:ea typeface="Times New Roman" panose="02020603050405020304"/>
                   <a:cs typeface="Times New Roman" panose="02020603050405020304"/>
                 </a:rPr>
-                <a:t>human</a:t>
+                <a:t>worker</a:t>
               </a:r>
               <a:endParaRPr sz="1140" b="0" i="0">
                 <a:solidFill>
